--- a/3rd year/software engineering/7/7ПР_ВласовАА_КЭ-342.pptx
+++ b/3rd year/software engineering/7/7ПР_ВласовАА_КЭ-342.pptx
@@ -108,6 +108,11 @@
       </a:defRPr>
     </a:lvl9pPr>
   </p:defaultTextStyle>
+  <p:extLst>
+    <p:ext uri="{EFAFB233-063F-42B5-8137-9DF3F51BA10A}">
+      <p15:sldGuideLst xmlns:p15="http://schemas.microsoft.com/office/powerpoint/2012/main"/>
+    </p:ext>
+  </p:extLst>
 </p:presentation>
 </file>
 
@@ -193,7 +198,7 @@
           <a:p>
             <a:fld id="{149BE93B-5000-454B-BCA1-95C30D9972FA}" type="datetimeFigureOut">
               <a:rPr lang="ru-RU" smtClean="0"/>
-              <a:t>01.06.2025</a:t>
+              <a:t>02.06.2025</a:t>
             </a:fld>
             <a:endParaRPr lang="ru-RU"/>
           </a:p>
@@ -641,7 +646,7 @@
             </a:br>
             <a:r>
               <a:rPr lang="ru-RU" dirty="0"/>
-              <a:t>Участвуют следующие участники: пользователь, интерфейс чата, контроллер сообщений, сущности сообщения и получателя, а также объект уведомления.</a:t>
+              <a:t>Участвуют следующие участники: пользователь, интерфейс чата, контроллер сообщений и система.</a:t>
             </a:r>
             <a:br>
               <a:rPr lang="ru-RU" dirty="0"/>
@@ -655,7 +660,7 @@
             </a:br>
             <a:r>
               <a:rPr lang="ru-RU" dirty="0"/>
-              <a:t>Затем сообщение доставляется получателю, и при необходимости — формируется и отправляется уведомление.</a:t>
+              <a:t>Затем сообщение отправляется, и при необходимости — формируется и отправляется уведомление.</a:t>
             </a:r>
             <a:br>
               <a:rPr lang="ru-RU" dirty="0"/>
@@ -850,7 +855,7 @@
           <a:p>
             <a:fld id="{C007B108-30B7-4F3B-88C8-110228178415}" type="datetimeFigureOut">
               <a:rPr lang="ru-RU" smtClean="0"/>
-              <a:t>01.06.2025</a:t>
+              <a:t>02.06.2025</a:t>
             </a:fld>
             <a:endParaRPr lang="ru-RU"/>
           </a:p>
@@ -1048,7 +1053,7 @@
           <a:p>
             <a:fld id="{C007B108-30B7-4F3B-88C8-110228178415}" type="datetimeFigureOut">
               <a:rPr lang="ru-RU" smtClean="0"/>
-              <a:t>01.06.2025</a:t>
+              <a:t>02.06.2025</a:t>
             </a:fld>
             <a:endParaRPr lang="ru-RU"/>
           </a:p>
@@ -1256,7 +1261,7 @@
           <a:p>
             <a:fld id="{C007B108-30B7-4F3B-88C8-110228178415}" type="datetimeFigureOut">
               <a:rPr lang="ru-RU" smtClean="0"/>
-              <a:t>01.06.2025</a:t>
+              <a:t>02.06.2025</a:t>
             </a:fld>
             <a:endParaRPr lang="ru-RU"/>
           </a:p>
@@ -1454,7 +1459,7 @@
           <a:p>
             <a:fld id="{C007B108-30B7-4F3B-88C8-110228178415}" type="datetimeFigureOut">
               <a:rPr lang="ru-RU" smtClean="0"/>
-              <a:t>01.06.2025</a:t>
+              <a:t>02.06.2025</a:t>
             </a:fld>
             <a:endParaRPr lang="ru-RU"/>
           </a:p>
@@ -1729,7 +1734,7 @@
           <a:p>
             <a:fld id="{C007B108-30B7-4F3B-88C8-110228178415}" type="datetimeFigureOut">
               <a:rPr lang="ru-RU" smtClean="0"/>
-              <a:t>01.06.2025</a:t>
+              <a:t>02.06.2025</a:t>
             </a:fld>
             <a:endParaRPr lang="ru-RU"/>
           </a:p>
@@ -1994,7 +1999,7 @@
           <a:p>
             <a:fld id="{C007B108-30B7-4F3B-88C8-110228178415}" type="datetimeFigureOut">
               <a:rPr lang="ru-RU" smtClean="0"/>
-              <a:t>01.06.2025</a:t>
+              <a:t>02.06.2025</a:t>
             </a:fld>
             <a:endParaRPr lang="ru-RU"/>
           </a:p>
@@ -2406,7 +2411,7 @@
           <a:p>
             <a:fld id="{C007B108-30B7-4F3B-88C8-110228178415}" type="datetimeFigureOut">
               <a:rPr lang="ru-RU" smtClean="0"/>
-              <a:t>01.06.2025</a:t>
+              <a:t>02.06.2025</a:t>
             </a:fld>
             <a:endParaRPr lang="ru-RU"/>
           </a:p>
@@ -2547,7 +2552,7 @@
           <a:p>
             <a:fld id="{C007B108-30B7-4F3B-88C8-110228178415}" type="datetimeFigureOut">
               <a:rPr lang="ru-RU" smtClean="0"/>
-              <a:t>01.06.2025</a:t>
+              <a:t>02.06.2025</a:t>
             </a:fld>
             <a:endParaRPr lang="ru-RU"/>
           </a:p>
@@ -2660,7 +2665,7 @@
           <a:p>
             <a:fld id="{C007B108-30B7-4F3B-88C8-110228178415}" type="datetimeFigureOut">
               <a:rPr lang="ru-RU" smtClean="0"/>
-              <a:t>01.06.2025</a:t>
+              <a:t>02.06.2025</a:t>
             </a:fld>
             <a:endParaRPr lang="ru-RU"/>
           </a:p>
@@ -2971,7 +2976,7 @@
           <a:p>
             <a:fld id="{C007B108-30B7-4F3B-88C8-110228178415}" type="datetimeFigureOut">
               <a:rPr lang="ru-RU" smtClean="0"/>
-              <a:t>01.06.2025</a:t>
+              <a:t>02.06.2025</a:t>
             </a:fld>
             <a:endParaRPr lang="ru-RU"/>
           </a:p>
@@ -3259,7 +3264,7 @@
           <a:p>
             <a:fld id="{C007B108-30B7-4F3B-88C8-110228178415}" type="datetimeFigureOut">
               <a:rPr lang="ru-RU" smtClean="0"/>
-              <a:t>01.06.2025</a:t>
+              <a:t>02.06.2025</a:t>
             </a:fld>
             <a:endParaRPr lang="ru-RU"/>
           </a:p>
@@ -3500,7 +3505,7 @@
           <a:p>
             <a:fld id="{C007B108-30B7-4F3B-88C8-110228178415}" type="datetimeFigureOut">
               <a:rPr lang="ru-RU" smtClean="0"/>
-              <a:t>01.06.2025</a:t>
+              <a:t>02.06.2025</a:t>
             </a:fld>
             <a:endParaRPr lang="ru-RU"/>
           </a:p>
@@ -3958,10 +3963,10 @@
       </p:sp>
       <p:pic>
         <p:nvPicPr>
-          <p:cNvPr id="4" name="Рисунок 3">
-            <a:extLst>
-              <a:ext uri="{FF2B5EF4-FFF2-40B4-BE49-F238E27FC236}">
-                <a16:creationId xmlns:a16="http://schemas.microsoft.com/office/drawing/2014/main" id="{DDA6AE6D-27F2-04BC-1BAA-D8F7164E466D}"/>
+          <p:cNvPr id="5" name="Рисунок 4">
+            <a:extLst>
+              <a:ext uri="{FF2B5EF4-FFF2-40B4-BE49-F238E27FC236}">
+                <a16:creationId xmlns:a16="http://schemas.microsoft.com/office/drawing/2014/main" id="{32D97371-A0B3-6367-BFD5-B6D215BA834A}"/>
               </a:ext>
             </a:extLst>
           </p:cNvPr>
@@ -3984,8 +3989,8 @@
         </p:blipFill>
         <p:spPr>
           <a:xfrm>
-            <a:off x="546470" y="811410"/>
-            <a:ext cx="11099057" cy="5887971"/>
+            <a:off x="683287" y="811410"/>
+            <a:ext cx="10825424" cy="5905488"/>
           </a:xfrm>
           <a:prstGeom prst="rect">
             <a:avLst/>
@@ -4063,10 +4068,10 @@
       </p:sp>
       <p:pic>
         <p:nvPicPr>
-          <p:cNvPr id="4" name="Рисунок 3">
-            <a:extLst>
-              <a:ext uri="{FF2B5EF4-FFF2-40B4-BE49-F238E27FC236}">
-                <a16:creationId xmlns:a16="http://schemas.microsoft.com/office/drawing/2014/main" id="{3F00E686-A9D4-4ADD-5E71-8405CA00FADE}"/>
+          <p:cNvPr id="5" name="Рисунок 4">
+            <a:extLst>
+              <a:ext uri="{FF2B5EF4-FFF2-40B4-BE49-F238E27FC236}">
+                <a16:creationId xmlns:a16="http://schemas.microsoft.com/office/drawing/2014/main" id="{74D1281D-027D-407F-E45A-24A09545EA3F}"/>
               </a:ext>
             </a:extLst>
           </p:cNvPr>
@@ -4089,8 +4094,8 @@
         </p:blipFill>
         <p:spPr>
           <a:xfrm>
-            <a:off x="1078496" y="981354"/>
-            <a:ext cx="10035007" cy="5732830"/>
+            <a:off x="2603730" y="981354"/>
+            <a:ext cx="6984539" cy="5596097"/>
           </a:xfrm>
           <a:prstGeom prst="rect">
             <a:avLst/>
